--- a/dist/초2/정보·AI/디지털생활/초2_정보·AI_디지털생활_01_온라인예절.pptx
+++ b/dist/초2/정보·AI/디지털생활/초2_정보·AI_디지털생활_01_온라인예절.pptx
@@ -120,13 +120,13 @@
   <p:extLst>
     <p:ext uri="{521415D9-36F7-43E2-AB2F-B90AF26B5E84}">
       <p14:sectionLst xmlns:p14="http://schemas.microsoft.com/office/powerpoint/2010/main">
-        <p14:section name="도입" id="{14abbef8-3cf4-da5c-fe59-8e3d09d441f7}">
+        <p14:section name="도입" id="{15d08478-9d19-fc77-d96d-183cb525e525}">
           <p14:sldIdLst>
             <p14:sldId id="256"/>
             <p14:sldId id="257"/>
           </p14:sldIdLst>
         </p14:section>
-        <p14:section name="개념" id="{08b0fb91-9644-6b48-32df-8b48bb0b34ec}">
+        <p14:section name="개념" id="{d55b9804-2104-a382-1c4d-2bc7241d90c9}">
           <p14:sldIdLst>
             <p14:sldId id="258"/>
             <p14:sldId id="260"/>
@@ -134,38 +134,38 @@
             <p14:sldId id="263"/>
           </p14:sldIdLst>
         </p14:section>
-        <p14:section name="연습" id="{2a474a8f-c713-f5dd-6bc7-0a382f972a47}">
+        <p14:section name="연습" id="{92d17723-b9f2-2532-d12c-c9060e2608a8}">
           <p14:sldIdLst>
             <p14:sldId id="259"/>
             <p14:sldId id="262"/>
             <p14:sldId id="264"/>
           </p14:sldIdLst>
         </p14:section>
-        <p14:section name="개념" id="{bda870af-a5ba-c349-ace3-4dc653bfa5ba}">
+        <p14:section name="개념" id="{43c31dca-fdf3-755c-eb16-091ff6fd1be1}">
           <p14:sldIdLst/>
         </p14:section>
-        <p14:section name="연습" id="{26e4129c-4edb-7050-1d6c-7ab385d35c90}">
+        <p14:section name="연습" id="{966a1837-961b-667a-1e37-272421fdb6fb}">
           <p14:sldIdLst/>
         </p14:section>
-        <p14:section name="개념" id="{988d047b-de49-09c7-ac02-871c73715581}">
+        <p14:section name="개념" id="{f1285769-e4f5-4f6a-e6b7-cef320641c5a}">
           <p14:sldIdLst/>
         </p14:section>
-        <p14:section name="연습" id="{2ee2b923-b035-43c7-c5fc-75ede052aa35}">
+        <p14:section name="연습" id="{20de12b4-8841-2fca-f5c7-da57e4efee9a}">
           <p14:sldIdLst/>
         </p14:section>
-        <p14:section name="확인" id="{254e6d6d-b204-2949-46bf-6e57e2136e5f}">
+        <p14:section name="확인" id="{04247b91-9ee2-82a9-2464-f23434a7e8b6}">
           <p14:sldIdLst>
             <p14:sldId id="265"/>
             <p14:sldId id="266"/>
             <p14:sldId id="267"/>
           </p14:sldIdLst>
         </p14:section>
-        <p14:section name="정리" id="{f8b091ef-6001-0766-7027-489d178e1e96}">
+        <p14:section name="정리" id="{969e1bc9-20a0-0a49-5c67-840128718b01}">
           <p14:sldIdLst>
             <p14:sldId id="268"/>
           </p14:sldIdLst>
         </p14:section>
-        <p14:section name="보충" id="{ad41b09e-ae26-954f-2a0e-023e6ce7fafa}">
+        <p14:section name="보충" id="{2dba46b9-c8fd-26af-084c-534882b9ad5e}">
           <p14:sldIdLst>
             <p14:sldId id="269"/>
           </p14:sldIdLst>
@@ -1083,7 +1083,7 @@
 막히면
 - 부모가 모르는 사람 역할을 하고, 아이가 “말할 수 없어요.” 하고 부모(진짜 역할)에게 가는 연습을 합니다.
 주의
-- 이 차시는 계획상 앞 차시가 없습니다. 보충으로도 어렵다면 초2 국어 ‘바르고 고운 말’, 초1 ‘사용 시간과 개인정보’를 먼저 합니다.</a:t>
+- 보충으로도 어렵다면 초2 국어 ‘바르고 고운 말’, 초1 ‘사용 시간과 개인정보’를 먼저 합니다.</a:t>
             </a:r>
             <a:endParaRPr lang="en-US" dirty="0"/>
           </a:p>
@@ -1182,7 +1182,7 @@
 - ② “말하지 않아요.” “엄마(아빠)한테 가요.”
 막히면
 - ①이나 ②가 어려우면 S14(보충)를 먼저 합니다.
-- 이 차시는 계획상 앞 차시가 없습니다. 초2 국어 ‘바르고 고운 말’, 초1 ‘사용 시간과 개인정보’와 이어지는 내용입니다.</a:t>
+- 초2 국어 ‘바르고 고운 말’, 초1 ‘사용 시간과 개인정보’와 이어지는 내용입니다.</a:t>
             </a:r>
             <a:endParaRPr lang="en-US" dirty="0"/>
           </a:p>
